--- a/docs/content/introduction/introduction_activity.pptx
+++ b/docs/content/introduction/introduction_activity.pptx
@@ -15,6 +15,8 @@
     <p:sldId id="263" r:id="rId9"/>
     <p:sldId id="264" r:id="rId10"/>
     <p:sldId id="265" r:id="rId11"/>
+    <p:sldId id="266" r:id="rId12"/>
+    <p:sldId id="267" r:id="rId13"/>
   </p:sldIdLst>
   <p:sldSz cx="9144000" cy="5143500" type="screen16x9"/>
   <p:notesSz cx="6858000" cy="9144000"/>
@@ -3487,13 +3489,987 @@
               <a:t>. It covers exactly what we practiced today: turning an observation into a testable question, and why we sample instead of measuring every leaf that exists.</a:t>
             </a:r>
           </a:p>
+        </p:txBody>
+      </p:sp>
+    </p:spTree>
+  </p:cSld>
+</p:sld>
+</file>
+
+<file path=ppt/slides/slide11.xml><?xml version="1.0" encoding="utf-8"?>
+<p:sld xmlns:a="http://schemas.openxmlformats.org/drawingml/2006/main" xmlns:r="http://schemas.openxmlformats.org/officeDocument/2006/relationships" xmlns:p="http://schemas.openxmlformats.org/presentationml/2006/main">
+  <p:cSld>
+    <p:spTree>
+      <p:nvGrpSpPr>
+        <p:cNvPr id="1" name=""/>
+        <p:cNvGrpSpPr/>
+        <p:nvPr/>
+      </p:nvGrpSpPr>
+      <p:grpSpPr>
+        <a:xfrm>
+          <a:off x="0" y="0"/>
+          <a:ext cx="0" cy="0"/>
+          <a:chOff x="0" y="0"/>
+          <a:chExt cx="0" cy="0"/>
+        </a:xfrm>
+      </p:grpSpPr>
+      <p:sp>
+        <p:nvSpPr>
+          <p:cNvPr id="2" name="Title 1"/>
+          <p:cNvSpPr>
+            <a:spLocks noGrp="1"/>
+          </p:cNvSpPr>
+          <p:nvPr>
+            <p:ph type="title"/>
+          </p:nvPr>
+        </p:nvSpPr>
+        <p:spPr>
+          <a:xfrm>
+            <a:off x="0" y="0"/>
+            <a:ext cx="9144000" cy="582780"/>
+          </a:xfrm>
+        </p:spPr>
+        <p:txBody>
+          <a:bodyPr/>
+          <a:lstStyle/>
           <a:p>
             <a:pPr lvl="0" indent="0" marL="0">
               <a:buNone/>
             </a:pPr>
             <a:r>
+              <a:rPr/>
+              <a:t>Extension — out of class (~30–40 min)</a:t>
+            </a:r>
+          </a:p>
+        </p:txBody>
+      </p:sp>
+      <p:sp>
+        <p:nvSpPr>
+          <p:cNvPr id="3" name="Content Placeholder 2"/>
+          <p:cNvSpPr>
+            <a:spLocks noGrp="1"/>
+          </p:cNvSpPr>
+          <p:nvPr>
+            <p:ph idx="1"/>
+          </p:nvPr>
+        </p:nvSpPr>
+        <p:spPr/>
+        <p:txBody>
+          <a:bodyPr/>
+          <a:lstStyle/>
+          <a:p>
+            <a:pPr lvl="0" indent="0" marL="0">
+              <a:buNone/>
+            </a:pPr>
+            <a:r>
               <a:rPr i="1"/>
-              <a:t>Next time: we bring this spreadsheet into R and build our first plot.</a:t>
+              <a:t>Your first solo R session. Use the leaf dataset from class (</a:t>
+            </a:r>
+            <a:r>
+              <a:rPr i="1">
+                <a:latin typeface="Courier"/>
+              </a:rPr>
+              <a:t>data/2026_06_25_tree_experiment_raw_data.xlsx</a:t>
+            </a:r>
+            <a:r>
+              <a:rPr i="1"/>
+              <a:t>). Everything you need was in Lecture/Worksheet 01–02.</a:t>
+            </a:r>
+          </a:p>
+          <a:p>
+            <a:pPr lvl="0" indent="0" marL="1270000">
+              <a:buNone/>
+            </a:pPr>
+            <a:r>
+              <a:rPr sz="2000" b="1"/>
+              <a:t>Important</a:t>
+            </a:r>
+          </a:p>
+          <a:p>
+            <a:pPr lvl="0" indent="0" marL="1270000">
+              <a:buNone/>
+            </a:pPr>
+            <a:r>
+              <a:rPr sz="2000" b="1"/>
+              <a:t>E2 and E3 must be handwritten</a:t>
+            </a:r>
+            <a:r>
+              <a:rPr sz="2000"/>
+              <a:t> on paper, photographed, and embedded (</a:t>
+            </a:r>
+            <a:r>
+              <a:rPr sz="2000">
+                <a:latin typeface="Courier"/>
+              </a:rPr>
+              <a:t>![caption](my_photo.jpg)</a:t>
+            </a:r>
+            <a:r>
+              <a:rPr sz="2000"/>
+              <a:t>). Typed answers get </a:t>
+            </a:r>
+            <a:r>
+              <a:rPr sz="2000" b="1"/>
+              <a:t>at most half credit, even if correct</a:t>
+            </a:r>
+            <a:r>
+              <a:rPr sz="2000"/>
+              <a:t> — this is about your prediction </a:t>
+            </a:r>
+            <a:r>
+              <a:rPr sz="2000" i="1"/>
+              <a:t>before</a:t>
+            </a:r>
+            <a:r>
+              <a:rPr sz="2000"/>
+              <a:t> the output and your own words after.</a:t>
+            </a:r>
+          </a:p>
+          <a:p>
+            <a:pPr lvl="0" indent="0" marL="0">
+              <a:spcBef>
+                <a:spcPts val="3000"/>
+              </a:spcBef>
+              <a:buNone/>
+            </a:pPr>
+            <a:r>
+              <a:rPr b="1"/>
+              <a:t>E1 · Load and plot (3 pts)</a:t>
+            </a:r>
+          </a:p>
+          <a:p>
+            <a:pPr lvl="0" indent="0">
+              <a:buNone/>
+            </a:pPr>
+            <a:r>
+              <a:rPr>
+                <a:solidFill>
+                  <a:srgbClr val="4758AB"/>
+                </a:solidFill>
+                <a:latin typeface="Courier"/>
+              </a:rPr>
+              <a:t>library</a:t>
+            </a:r>
+            <a:r>
+              <a:rPr>
+                <a:solidFill>
+                  <a:srgbClr val="003B4F"/>
+                </a:solidFill>
+                <a:latin typeface="Courier"/>
+              </a:rPr>
+              <a:t>(readxl)</a:t>
+            </a:r>
+            <a:br/>
+            <a:r>
+              <a:rPr>
+                <a:solidFill>
+                  <a:srgbClr val="4758AB"/>
+                </a:solidFill>
+                <a:latin typeface="Courier"/>
+              </a:rPr>
+              <a:t>library</a:t>
+            </a:r>
+            <a:r>
+              <a:rPr>
+                <a:solidFill>
+                  <a:srgbClr val="003B4F"/>
+                </a:solidFill>
+                <a:latin typeface="Courier"/>
+              </a:rPr>
+              <a:t>(tidyverse)</a:t>
+            </a:r>
+            <a:br/>
+            <a:r>
+              <a:rPr>
+                <a:solidFill>
+                  <a:srgbClr val="003B4F"/>
+                </a:solidFill>
+                <a:latin typeface="Courier"/>
+              </a:rPr>
+              <a:t>tree_df &lt;- </a:t>
+            </a:r>
+            <a:r>
+              <a:rPr>
+                <a:solidFill>
+                  <a:srgbClr val="4758AB"/>
+                </a:solidFill>
+                <a:latin typeface="Courier"/>
+              </a:rPr>
+              <a:t>read_excel</a:t>
+            </a:r>
+            <a:r>
+              <a:rPr>
+                <a:solidFill>
+                  <a:srgbClr val="003B4F"/>
+                </a:solidFill>
+                <a:latin typeface="Courier"/>
+              </a:rPr>
+              <a:t>(</a:t>
+            </a:r>
+            <a:r>
+              <a:rPr>
+                <a:solidFill>
+                  <a:srgbClr val="20794D"/>
+                </a:solidFill>
+                <a:latin typeface="Courier"/>
+              </a:rPr>
+              <a:t>"data/2026_06_25_tree_experiment_raw_data.xlsx"</a:t>
+            </a:r>
+            <a:r>
+              <a:rPr>
+                <a:solidFill>
+                  <a:srgbClr val="003B4F"/>
+                </a:solidFill>
+                <a:latin typeface="Courier"/>
+              </a:rPr>
+              <a:t>)</a:t>
+            </a:r>
+            <a:br/>
+            <a:br/>
+            <a:r>
+              <a:rPr>
+                <a:solidFill>
+                  <a:srgbClr val="4758AB"/>
+                </a:solidFill>
+                <a:latin typeface="Courier"/>
+              </a:rPr>
+              <a:t>glimpse</a:t>
+            </a:r>
+            <a:r>
+              <a:rPr>
+                <a:solidFill>
+                  <a:srgbClr val="003B4F"/>
+                </a:solidFill>
+                <a:latin typeface="Courier"/>
+              </a:rPr>
+              <a:t>(tree_df)</a:t>
+            </a:r>
+            <a:br/>
+            <a:br/>
+            <a:r>
+              <a:rPr>
+                <a:solidFill>
+                  <a:srgbClr val="003B4F"/>
+                </a:solidFill>
+                <a:latin typeface="Courier"/>
+              </a:rPr>
+              <a:t>tree_df </a:t>
+            </a:r>
+            <a:r>
+              <a:rPr>
+                <a:solidFill>
+                  <a:srgbClr val="5E5E5E"/>
+                </a:solidFill>
+                <a:latin typeface="Courier"/>
+              </a:rPr>
+              <a:t>%&gt;%</a:t>
+            </a:r>
+            <a:br/>
+            <a:r>
+              <a:rPr>
+                <a:solidFill>
+                  <a:srgbClr val="003B4F"/>
+                </a:solidFill>
+                <a:latin typeface="Courier"/>
+              </a:rPr>
+              <a:t>  </a:t>
+            </a:r>
+            <a:r>
+              <a:rPr>
+                <a:solidFill>
+                  <a:srgbClr val="4758AB"/>
+                </a:solidFill>
+                <a:latin typeface="Courier"/>
+              </a:rPr>
+              <a:t>ggplot</a:t>
+            </a:r>
+            <a:r>
+              <a:rPr>
+                <a:solidFill>
+                  <a:srgbClr val="003B4F"/>
+                </a:solidFill>
+                <a:latin typeface="Courier"/>
+              </a:rPr>
+              <a:t>(</a:t>
+            </a:r>
+            <a:r>
+              <a:rPr>
+                <a:solidFill>
+                  <a:srgbClr val="4758AB"/>
+                </a:solidFill>
+                <a:latin typeface="Courier"/>
+              </a:rPr>
+              <a:t>aes</a:t>
+            </a:r>
+            <a:r>
+              <a:rPr>
+                <a:solidFill>
+                  <a:srgbClr val="003B4F"/>
+                </a:solidFill>
+                <a:latin typeface="Courier"/>
+              </a:rPr>
+              <a:t>(</a:t>
+            </a:r>
+            <a:r>
+              <a:rPr>
+                <a:solidFill>
+                  <a:srgbClr val="657422"/>
+                </a:solidFill>
+                <a:latin typeface="Courier"/>
+              </a:rPr>
+              <a:t>x =</a:t>
+            </a:r>
+            <a:r>
+              <a:rPr>
+                <a:solidFill>
+                  <a:srgbClr val="003B4F"/>
+                </a:solidFill>
+                <a:latin typeface="Courier"/>
+              </a:rPr>
+              <a:t> width_cm, </a:t>
+            </a:r>
+            <a:r>
+              <a:rPr>
+                <a:solidFill>
+                  <a:srgbClr val="657422"/>
+                </a:solidFill>
+                <a:latin typeface="Courier"/>
+              </a:rPr>
+              <a:t>y =</a:t>
+            </a:r>
+            <a:r>
+              <a:rPr>
+                <a:solidFill>
+                  <a:srgbClr val="003B4F"/>
+                </a:solidFill>
+                <a:latin typeface="Courier"/>
+              </a:rPr>
+              <a:t> weight_g, </a:t>
+            </a:r>
+            <a:r>
+              <a:rPr>
+                <a:solidFill>
+                  <a:srgbClr val="657422"/>
+                </a:solidFill>
+                <a:latin typeface="Courier"/>
+              </a:rPr>
+              <a:t>color =</a:t>
+            </a:r>
+            <a:r>
+              <a:rPr>
+                <a:solidFill>
+                  <a:srgbClr val="003B4F"/>
+                </a:solidFill>
+                <a:latin typeface="Courier"/>
+              </a:rPr>
+              <a:t> side)) </a:t>
+            </a:r>
+            <a:r>
+              <a:rPr>
+                <a:solidFill>
+                  <a:srgbClr val="5E5E5E"/>
+                </a:solidFill>
+                <a:latin typeface="Courier"/>
+              </a:rPr>
+              <a:t>+</a:t>
+            </a:r>
+            <a:br/>
+            <a:r>
+              <a:rPr>
+                <a:solidFill>
+                  <a:srgbClr val="003B4F"/>
+                </a:solidFill>
+                <a:latin typeface="Courier"/>
+              </a:rPr>
+              <a:t>  </a:t>
+            </a:r>
+            <a:r>
+              <a:rPr>
+                <a:solidFill>
+                  <a:srgbClr val="4758AB"/>
+                </a:solidFill>
+                <a:latin typeface="Courier"/>
+              </a:rPr>
+              <a:t>geom_point</a:t>
+            </a:r>
+            <a:r>
+              <a:rPr>
+                <a:solidFill>
+                  <a:srgbClr val="003B4F"/>
+                </a:solidFill>
+                <a:latin typeface="Courier"/>
+              </a:rPr>
+              <a:t>(</a:t>
+            </a:r>
+            <a:r>
+              <a:rPr>
+                <a:solidFill>
+                  <a:srgbClr val="657422"/>
+                </a:solidFill>
+                <a:latin typeface="Courier"/>
+              </a:rPr>
+              <a:t>size =</a:t>
+            </a:r>
+            <a:r>
+              <a:rPr>
+                <a:solidFill>
+                  <a:srgbClr val="003B4F"/>
+                </a:solidFill>
+                <a:latin typeface="Courier"/>
+              </a:rPr>
+              <a:t> </a:t>
+            </a:r>
+            <a:r>
+              <a:rPr>
+                <a:solidFill>
+                  <a:srgbClr val="AD0000"/>
+                </a:solidFill>
+                <a:latin typeface="Courier"/>
+              </a:rPr>
+              <a:t>3</a:t>
+            </a:r>
+            <a:r>
+              <a:rPr>
+                <a:solidFill>
+                  <a:srgbClr val="003B4F"/>
+                </a:solidFill>
+                <a:latin typeface="Courier"/>
+              </a:rPr>
+              <a:t>, </a:t>
+            </a:r>
+            <a:r>
+              <a:rPr>
+                <a:solidFill>
+                  <a:srgbClr val="657422"/>
+                </a:solidFill>
+                <a:latin typeface="Courier"/>
+              </a:rPr>
+              <a:t>alpha =</a:t>
+            </a:r>
+            <a:r>
+              <a:rPr>
+                <a:solidFill>
+                  <a:srgbClr val="003B4F"/>
+                </a:solidFill>
+                <a:latin typeface="Courier"/>
+              </a:rPr>
+              <a:t> </a:t>
+            </a:r>
+            <a:r>
+              <a:rPr>
+                <a:solidFill>
+                  <a:srgbClr val="AD0000"/>
+                </a:solidFill>
+                <a:latin typeface="Courier"/>
+              </a:rPr>
+              <a:t>0.7</a:t>
+            </a:r>
+            <a:r>
+              <a:rPr>
+                <a:solidFill>
+                  <a:srgbClr val="003B4F"/>
+                </a:solidFill>
+                <a:latin typeface="Courier"/>
+              </a:rPr>
+              <a:t>) </a:t>
+            </a:r>
+            <a:r>
+              <a:rPr>
+                <a:solidFill>
+                  <a:srgbClr val="5E5E5E"/>
+                </a:solidFill>
+                <a:latin typeface="Courier"/>
+              </a:rPr>
+              <a:t>+</a:t>
+            </a:r>
+            <a:br/>
+            <a:r>
+              <a:rPr>
+                <a:solidFill>
+                  <a:srgbClr val="003B4F"/>
+                </a:solidFill>
+                <a:latin typeface="Courier"/>
+              </a:rPr>
+              <a:t>  </a:t>
+            </a:r>
+            <a:r>
+              <a:rPr>
+                <a:solidFill>
+                  <a:srgbClr val="4758AB"/>
+                </a:solidFill>
+                <a:latin typeface="Courier"/>
+              </a:rPr>
+              <a:t>labs</a:t>
+            </a:r>
+            <a:r>
+              <a:rPr>
+                <a:solidFill>
+                  <a:srgbClr val="003B4F"/>
+                </a:solidFill>
+                <a:latin typeface="Courier"/>
+              </a:rPr>
+              <a:t>(</a:t>
+            </a:r>
+            <a:r>
+              <a:rPr>
+                <a:solidFill>
+                  <a:srgbClr val="657422"/>
+                </a:solidFill>
+                <a:latin typeface="Courier"/>
+              </a:rPr>
+              <a:t>x =</a:t>
+            </a:r>
+            <a:r>
+              <a:rPr>
+                <a:solidFill>
+                  <a:srgbClr val="003B4F"/>
+                </a:solidFill>
+                <a:latin typeface="Courier"/>
+              </a:rPr>
+              <a:t> </a:t>
+            </a:r>
+            <a:r>
+              <a:rPr>
+                <a:solidFill>
+                  <a:srgbClr val="20794D"/>
+                </a:solidFill>
+                <a:latin typeface="Courier"/>
+              </a:rPr>
+              <a:t>"Leaf width (cm)"</a:t>
+            </a:r>
+            <a:r>
+              <a:rPr>
+                <a:solidFill>
+                  <a:srgbClr val="003B4F"/>
+                </a:solidFill>
+                <a:latin typeface="Courier"/>
+              </a:rPr>
+              <a:t>, </a:t>
+            </a:r>
+            <a:r>
+              <a:rPr>
+                <a:solidFill>
+                  <a:srgbClr val="657422"/>
+                </a:solidFill>
+                <a:latin typeface="Courier"/>
+              </a:rPr>
+              <a:t>y =</a:t>
+            </a:r>
+            <a:r>
+              <a:rPr>
+                <a:solidFill>
+                  <a:srgbClr val="003B4F"/>
+                </a:solidFill>
+                <a:latin typeface="Courier"/>
+              </a:rPr>
+              <a:t> </a:t>
+            </a:r>
+            <a:r>
+              <a:rPr>
+                <a:solidFill>
+                  <a:srgbClr val="20794D"/>
+                </a:solidFill>
+                <a:latin typeface="Courier"/>
+              </a:rPr>
+              <a:t>"Leaf weight (g)"</a:t>
+            </a:r>
+            <a:r>
+              <a:rPr>
+                <a:solidFill>
+                  <a:srgbClr val="003B4F"/>
+                </a:solidFill>
+                <a:latin typeface="Courier"/>
+              </a:rPr>
+              <a:t>, </a:t>
+            </a:r>
+            <a:r>
+              <a:rPr>
+                <a:solidFill>
+                  <a:srgbClr val="657422"/>
+                </a:solidFill>
+                <a:latin typeface="Courier"/>
+              </a:rPr>
+              <a:t>color =</a:t>
+            </a:r>
+            <a:r>
+              <a:rPr>
+                <a:solidFill>
+                  <a:srgbClr val="003B4F"/>
+                </a:solidFill>
+                <a:latin typeface="Courier"/>
+              </a:rPr>
+              <a:t> </a:t>
+            </a:r>
+            <a:r>
+              <a:rPr>
+                <a:solidFill>
+                  <a:srgbClr val="20794D"/>
+                </a:solidFill>
+                <a:latin typeface="Courier"/>
+              </a:rPr>
+              <a:t>"Side"</a:t>
+            </a:r>
+            <a:r>
+              <a:rPr>
+                <a:solidFill>
+                  <a:srgbClr val="003B4F"/>
+                </a:solidFill>
+                <a:latin typeface="Courier"/>
+              </a:rPr>
+              <a:t>) </a:t>
+            </a:r>
+            <a:r>
+              <a:rPr>
+                <a:solidFill>
+                  <a:srgbClr val="5E5E5E"/>
+                </a:solidFill>
+                <a:latin typeface="Courier"/>
+              </a:rPr>
+              <a:t>+</a:t>
+            </a:r>
+            <a:br/>
+            <a:r>
+              <a:rPr>
+                <a:solidFill>
+                  <a:srgbClr val="003B4F"/>
+                </a:solidFill>
+                <a:latin typeface="Courier"/>
+              </a:rPr>
+              <a:t>  </a:t>
+            </a:r>
+            <a:r>
+              <a:rPr>
+                <a:solidFill>
+                  <a:srgbClr val="4758AB"/>
+                </a:solidFill>
+                <a:latin typeface="Courier"/>
+              </a:rPr>
+              <a:t>theme_minimal</a:t>
+            </a:r>
+            <a:r>
+              <a:rPr>
+                <a:solidFill>
+                  <a:srgbClr val="003B4F"/>
+                </a:solidFill>
+                <a:latin typeface="Courier"/>
+              </a:rPr>
+              <a:t>()</a:t>
+            </a:r>
+          </a:p>
+          <a:p>
+            <a:pPr lvl="0" indent="0" marL="0">
+              <a:buNone/>
+            </a:pPr>
+            <a:r>
+              <a:rPr/>
+              <a:t>Save the plot to </a:t>
+            </a:r>
+            <a:r>
+              <a:rPr>
+                <a:latin typeface="Courier"/>
+              </a:rPr>
+              <a:t>figures/</a:t>
+            </a:r>
+            <a:r>
+              <a:rPr/>
+              <a:t> at </a:t>
+            </a:r>
+            <a:r>
+              <a:rPr>
+                <a:latin typeface="Courier"/>
+              </a:rPr>
+              <a:t>dpi = 300</a:t>
+            </a:r>
+            <a:r>
+              <a:rPr/>
+              <a:t>. In one sentence each: do heavier leaves also tend to be wider? Which side looks heavier, just from the plot?</a:t>
+            </a:r>
+          </a:p>
+          <a:p>
+            <a:pPr lvl="0" indent="0" marL="0">
+              <a:spcBef>
+                <a:spcPts val="3000"/>
+              </a:spcBef>
+              <a:buNone/>
+            </a:pPr>
+            <a:r>
+              <a:rPr b="1"/>
+              <a:t>E2 · Predict, then check — ✍️ by hand (3 pts)</a:t>
+            </a:r>
+          </a:p>
+          <a:p>
+            <a:pPr lvl="0" indent="0" marL="0">
+              <a:buNone/>
+            </a:pPr>
+            <a:r>
+              <a:rPr b="1"/>
+              <a:t>Your ID code:</a:t>
+            </a:r>
+            <a:r>
+              <a:rPr/>
+              <a:t> last two digits of your student ID.</a:t>
+            </a:r>
+          </a:p>
+          <a:p>
+            <a:pPr lvl="0" indent="-342900" marL="342900">
+              <a:buAutoNum type="arabicPeriod"/>
+            </a:pPr>
+            <a:r>
+              <a:rPr/>
+              <a:t>From memory of your E1 scatter, sketch by hand what a </a:t>
+            </a:r>
+            <a:r>
+              <a:rPr b="1"/>
+              <a:t>boxplot</a:t>
+            </a:r>
+            <a:r>
+              <a:rPr/>
+              <a:t> of </a:t>
+            </a:r>
+            <a:r>
+              <a:rPr>
+                <a:latin typeface="Courier"/>
+              </a:rPr>
+              <a:t>weight_g</a:t>
+            </a:r>
+            <a:r>
+              <a:rPr/>
+              <a:t> by </a:t>
+            </a:r>
+            <a:r>
+              <a:rPr>
+                <a:latin typeface="Courier"/>
+              </a:rPr>
+              <a:t>side</a:t>
+            </a:r>
+            <a:r>
+              <a:rPr/>
+              <a:t> will look like — two rough boxes, where the middles and spreads fall. </a:t>
+            </a:r>
+            <a:r>
+              <a:rPr i="1"/>
+              <a:t>No peeking.</a:t>
+            </a:r>
+          </a:p>
+          <a:p>
+            <a:pPr lvl="0" indent="-342900" marL="342900">
+              <a:buAutoNum type="arabicPeriod"/>
+            </a:pPr>
+            <a:r>
+              <a:rPr/>
+              <a:t>Now run it (new code — work it out from your </a:t>
+            </a:r>
+            <a:r>
+              <a:rPr>
+                <a:latin typeface="Courier"/>
+              </a:rPr>
+              <a:t>geom_point()</a:t>
+            </a:r>
+            <a:r>
+              <a:rPr/>
+              <a:t> code): </a:t>
+            </a:r>
+            <a:r>
+              <a:rPr>
+                <a:latin typeface="Courier"/>
+              </a:rPr>
+              <a:t>tree_df %&gt;% ggplot(aes(x = side, y = weight_g)) + geom_boxplot()</a:t>
+            </a:r>
+          </a:p>
+          <a:p>
+            <a:pPr lvl="0" indent="-342900" marL="342900">
+              <a:buAutoNum type="arabicPeriod"/>
+            </a:pPr>
+            <a:r>
+              <a:rPr/>
+              <a:t>By hand, compare sketch to reality: right about which side is higher? more spread? What surprised you?</a:t>
+            </a:r>
+          </a:p>
+          <a:p>
+            <a:pPr lvl="0" indent="-342900" marL="342900">
+              <a:buAutoNum type="arabicPeriod"/>
+            </a:pPr>
+            <a:r>
+              <a:rPr/>
+              <a:t>Run </a:t>
+            </a:r>
+            <a:r>
+              <a:rPr>
+                <a:latin typeface="Courier"/>
+              </a:rPr>
+              <a:t>tree_df %&gt;% filter(index == &lt;your ID code&gt;)</a:t>
+            </a:r>
+            <a:r>
+              <a:rPr/>
+              <a:t> (if it exceeds the row count, use </a:t>
+            </a:r>
+            <a:r>
+              <a:rPr>
+                <a:latin typeface="Courier"/>
+              </a:rPr>
+              <a:t>index == &lt;ID code&gt; %% nrow(tree_df)</a:t>
+            </a:r>
+            <a:r>
+              <a:rPr/>
+              <a:t>). By hand, write that one leaf’s </a:t>
+            </a:r>
+            <a:r>
+              <a:rPr>
+                <a:latin typeface="Courier"/>
+              </a:rPr>
+              <a:t>side</a:t>
+            </a:r>
+            <a:r>
+              <a:rPr/>
+              <a:t>, </a:t>
+            </a:r>
+            <a:r>
+              <a:rPr>
+                <a:latin typeface="Courier"/>
+              </a:rPr>
+              <a:t>weight_g</a:t>
+            </a:r>
+            <a:r>
+              <a:rPr/>
+              <a:t>, </a:t>
+            </a:r>
+            <a:r>
+              <a:rPr>
+                <a:latin typeface="Courier"/>
+              </a:rPr>
+              <a:t>width_cm</a:t>
+            </a:r>
+            <a:r>
+              <a:rPr/>
+              <a:t>, </a:t>
+            </a:r>
+            <a:r>
+              <a:rPr>
+                <a:latin typeface="Courier"/>
+              </a:rPr>
+              <a:t>height_cm</a:t>
+            </a:r>
+            <a:r>
+              <a:rPr/>
+              <a:t> — </a:t>
+            </a:r>
+            <a:r>
+              <a:rPr i="1"/>
+              <a:t>your</a:t>
+            </a:r>
+            <a:r>
+              <a:rPr/>
+              <a:t> leaf.</a:t>
+            </a:r>
+          </a:p>
+          <a:p>
+            <a:pPr lvl="0" indent="0" marL="0">
+              <a:spcBef>
+                <a:spcPts val="3000"/>
+              </a:spcBef>
+              <a:buNone/>
+            </a:pPr>
+            <a:r>
+              <a:rPr b="1"/>
+              <a:t>E3 · Connect it to the science — ✍️ by hand (2 pts)</a:t>
+            </a:r>
+          </a:p>
+          <a:p>
+            <a:pPr lvl="0" indent="0" marL="0">
+              <a:buNone/>
+            </a:pPr>
+            <a:r>
+              <a:rPr/>
+              <a:t>In plain language, as if to a friend who’s never taken a science class:</a:t>
+            </a:r>
+          </a:p>
+          <a:p>
+            <a:pPr lvl="0" indent="-342900" marL="342900">
+              <a:buAutoNum type="arabicPeriod"/>
+            </a:pPr>
+            <a:r>
+              <a:rPr/>
+              <a:t>Using </a:t>
+            </a:r>
+            <a:r>
+              <a:rPr i="1"/>
+              <a:t>your</a:t>
+            </a:r>
+            <a:r>
+              <a:rPr/>
+              <a:t> leaf from E2, is it typical for its side or unusual? Why?</a:t>
+            </a:r>
+          </a:p>
+          <a:p>
+            <a:pPr lvl="0" indent="-342900" marL="342900">
+              <a:buAutoNum type="arabicPeriod"/>
+            </a:pPr>
+            <a:r>
+              <a:rPr/>
+              <a:t>Why measure </a:t>
+            </a:r>
+            <a:r>
+              <a:rPr i="1"/>
+              <a:t>many</a:t>
+            </a:r>
+            <a:r>
+              <a:rPr/>
+              <a:t> leaves per side instead of one? Use an analogy to something outside science.</a:t>
+            </a:r>
+          </a:p>
+          <a:p>
+            <a:pPr lvl="0" indent="-342900" marL="342900">
+              <a:buAutoNum type="arabicPeriod"/>
+            </a:pPr>
+            <a:r>
+              <a:rPr/>
+              <a:t>Why might shady leaves need to be larger to survive? (What does a leaf do, and what does it have less of on the shady side?)</a:t>
+            </a:r>
+          </a:p>
+        </p:txBody>
+      </p:sp>
+    </p:spTree>
+  </p:cSld>
+</p:sld>
+</file>
+
+<file path=ppt/slides/slide12.xml><?xml version="1.0" encoding="utf-8"?>
+<p:sld xmlns:a="http://schemas.openxmlformats.org/drawingml/2006/main" xmlns:r="http://schemas.openxmlformats.org/officeDocument/2006/relationships" xmlns:p="http://schemas.openxmlformats.org/presentationml/2006/main">
+  <p:cSld>
+    <p:spTree>
+      <p:nvGrpSpPr>
+        <p:cNvPr id="1" name=""/>
+        <p:cNvGrpSpPr/>
+        <p:nvPr/>
+      </p:nvGrpSpPr>
+      <p:grpSpPr>
+        <a:xfrm>
+          <a:off x="0" y="0"/>
+          <a:ext cx="0" cy="0"/>
+          <a:chOff x="0" y="0"/>
+          <a:chExt cx="0" cy="0"/>
+        </a:xfrm>
+      </p:grpSpPr>
+      <p:sp>
+        <p:nvSpPr>
+          <p:cNvPr id="3" name="Content Placeholder 2"/>
+          <p:cNvSpPr>
+            <a:spLocks noGrp="1"/>
+          </p:cNvSpPr>
+          <p:nvPr>
+            <p:ph idx="1"/>
+          </p:nvPr>
+        </p:nvSpPr>
+        <p:spPr/>
+        <p:txBody>
+          <a:bodyPr/>
+          <a:lstStyle/>
+          <a:p>
+            <a:pPr lvl="0" indent="0" marL="0">
+              <a:buNone/>
+            </a:pPr>
+            <a:r>
+              <a:rPr i="1"/>
+              <a:t>Next time: we bring this spreadsheet into R and build our first plot as a class.</a:t>
             </a:r>
           </a:p>
         </p:txBody>
@@ -3544,7 +4520,7 @@
             </a:r>
             <a:r>
               <a:rPr sz="2000"/>
-              <a:t> This is a field + discussion worksheet — no coding today. Work in your assigned group. Fill in every blank before you leave lab; you will need these answers again in Lecture 2 and in Homework 1.</a:t>
+              <a:t> This is a field + discussion worksheet — no coding today. Work in your assigned group. Fill in every blank before you leave lab; you will need these answers again in Lecture 2 and in the Extension.</a:t>
             </a:r>
           </a:p>
         </p:txBody>
